--- a/report/Team 41 COMP3110 Project Slide.pptx
+++ b/report/Team 41 COMP3110 Project Slide.pptx
@@ -3564,53 +3564,6 @@
       </p:pic>
       <p:pic>
         <p:nvPicPr>
-          <p:cNvPr id="8" name="Picture 4" descr="Blank Avatar Images – Browse 61,149 ...">
-            <a:extLst>
-              <a:ext uri="{FF2B5EF4-FFF2-40B4-BE49-F238E27FC236}">
-                <a16:creationId xmlns:a16="http://schemas.microsoft.com/office/drawing/2014/main" id="{EB73E20D-487E-2E83-6515-A5D57DDEABA2}"/>
-              </a:ext>
-            </a:extLst>
-          </p:cNvPr>
-          <p:cNvPicPr>
-            <a:picLocks noChangeAspect="1" noChangeArrowheads="1"/>
-          </p:cNvPicPr>
-          <p:nvPr/>
-        </p:nvPicPr>
-        <p:blipFill>
-          <a:blip r:embed="rId4">
-            <a:extLst>
-              <a:ext uri="{28A0092B-C50C-407E-A947-70E740481C1C}">
-                <a14:useLocalDpi xmlns:a14="http://schemas.microsoft.com/office/drawing/2010/main" val="0"/>
-              </a:ext>
-            </a:extLst>
-          </a:blip>
-          <a:srcRect/>
-          <a:stretch>
-            <a:fillRect/>
-          </a:stretch>
-        </p:blipFill>
-        <p:spPr bwMode="auto">
-          <a:xfrm>
-            <a:off x="5872440" y="3009019"/>
-            <a:ext cx="1977052" cy="1977052"/>
-          </a:xfrm>
-          <a:prstGeom prst="rect">
-            <a:avLst/>
-          </a:prstGeom>
-          <a:noFill/>
-          <a:extLst>
-            <a:ext uri="{909E8E84-426E-40DD-AFC4-6F175D3DCCD1}">
-              <a14:hiddenFill xmlns:a14="http://schemas.microsoft.com/office/drawing/2010/main">
-                <a:solidFill>
-                  <a:srgbClr val="FFFFFF"/>
-                </a:solidFill>
-              </a14:hiddenFill>
-            </a:ext>
-          </a:extLst>
-        </p:spPr>
-      </p:pic>
-      <p:pic>
-        <p:nvPicPr>
           <p:cNvPr id="1030" name="Picture 6">
             <a:extLst>
               <a:ext uri="{FF2B5EF4-FFF2-40B4-BE49-F238E27FC236}">
@@ -3844,6 +3797,53 @@
           </a:p>
         </p:txBody>
       </p:sp>
+      <p:pic>
+        <p:nvPicPr>
+          <p:cNvPr id="1032" name="Picture 8">
+            <a:extLst>
+              <a:ext uri="{FF2B5EF4-FFF2-40B4-BE49-F238E27FC236}">
+                <a16:creationId xmlns:a16="http://schemas.microsoft.com/office/drawing/2014/main" id="{5C2FC8A4-984C-8391-9272-164EF0F9FC11}"/>
+              </a:ext>
+            </a:extLst>
+          </p:cNvPr>
+          <p:cNvPicPr>
+            <a:picLocks noChangeAspect="1" noChangeArrowheads="1"/>
+          </p:cNvPicPr>
+          <p:nvPr/>
+        </p:nvPicPr>
+        <p:blipFill>
+          <a:blip r:embed="rId6">
+            <a:extLst>
+              <a:ext uri="{28A0092B-C50C-407E-A947-70E740481C1C}">
+                <a14:useLocalDpi xmlns:a14="http://schemas.microsoft.com/office/drawing/2010/main" val="0"/>
+              </a:ext>
+            </a:extLst>
+          </a:blip>
+          <a:srcRect/>
+          <a:stretch>
+            <a:fillRect/>
+          </a:stretch>
+        </p:blipFill>
+        <p:spPr bwMode="auto">
+          <a:xfrm>
+            <a:off x="6124136" y="2777828"/>
+            <a:ext cx="1641422" cy="2193980"/>
+          </a:xfrm>
+          <a:prstGeom prst="rect">
+            <a:avLst/>
+          </a:prstGeom>
+          <a:noFill/>
+          <a:extLst>
+            <a:ext uri="{909E8E84-426E-40DD-AFC4-6F175D3DCCD1}">
+              <a14:hiddenFill xmlns:a14="http://schemas.microsoft.com/office/drawing/2010/main">
+                <a:solidFill>
+                  <a:srgbClr val="FFFFFF"/>
+                </a:solidFill>
+              </a14:hiddenFill>
+            </a:ext>
+          </a:extLst>
+        </p:spPr>
+      </p:pic>
     </p:spTree>
     <p:extLst>
       <p:ext uri="{BB962C8B-B14F-4D97-AF65-F5344CB8AC3E}">
